--- a/fixtures/sample-editor-table-text.pptx
+++ b/fixtures/sample-editor-table-text.pptx
@@ -290,7 +290,7 @@
                       </a:r>
                     </a:p>
                   </a:txBody>
-                  <a:tcPr>
+                  <a:tcPr vert="vert270" marL="171450" marR="76200" marT="95250" marB="57150">
                     <a:solidFill>
                       <a:srgbClr val="F5F3FF"/>
                     </a:solidFill>

--- a/fixtures/sample-editor-table-text.pptx
+++ b/fixtures/sample-editor-table-text.pptx
@@ -7,6 +7,7 @@
   <p:sldIdLst>
     <p:sldId id="256" r:id="rId2"/>
     <p:sldId id="257" r:id="rId3"/>
+    <p:sldId id="258" r:id="rId4"/>
   </p:sldIdLst>
   <p:sldSz cx="12192000" cy="6858000"/>
   <p:notesSz cx="6858000" cy="9144000"/>
@@ -3049,6 +3050,303 @@
 </p:sld>
 </file>
 
+<file path=ppt/slides/slide3.xml><?xml version="1.0" encoding="utf-8"?>
+<p:sld xmlns:a="http://schemas.openxmlformats.org/drawingml/2006/main" xmlns:r="http://schemas.openxmlformats.org/officeDocument/2006/relationships" xmlns:p="http://schemas.openxmlformats.org/presentationml/2006/main">
+  <p:cSld>
+    <p:spTree>
+      <p:nvGrpSpPr>
+        <p:cNvPr id="1" name=""/>
+        <p:cNvGrpSpPr/>
+        <p:nvPr/>
+      </p:nvGrpSpPr>
+      <p:grpSpPr>
+        <a:xfrm>
+          <a:off x="0" y="0"/>
+          <a:ext cx="0" cy="0"/>
+          <a:chOff x="0" y="0"/>
+          <a:chExt cx="0" cy="0"/>
+        </a:xfrm>
+      </p:grpSpPr>
+      <p:graphicFrame>
+        <p:nvGraphicFramePr>
+          <p:cNvPr id="103" name="追加行样式"/>
+          <p:cNvGraphicFramePr/>
+          <p:nvPr/>
+        </p:nvGraphicFramePr>
+        <p:xfrm>
+          <a:off x="1333500" y="857250"/>
+          <a:ext cx="8382000" cy="2571750"/>
+        </p:xfrm>
+        <a:graphic>
+          <a:graphicData uri="http://schemas.openxmlformats.org/drawingml/2006/table">
+            <a:tbl>
+              <a:tblPr firstRow="1" lastRow="1" bandRow="1">
+                <a:tableStyleId>{BFD9FC95-08A9-47D3-9785-8DB2E5A35D39}</a:tableStyleId>
+              </a:tblPr>
+              <a:tblGrid>
+                <a:gridCol w="2095500"/>
+                <a:gridCol w="2095500"/>
+                <a:gridCol w="2095500"/>
+                <a:gridCol w="2095500"/>
+              </a:tblGrid>
+              <a:tr h="857250">
+                <a:tc>
+                  <a:txBody>
+                    <a:bodyPr/>
+                    <a:lstStyle/>
+                    <a:p>
+                      <a:r>
+                        <a:t>标题一</a:t>
+                      </a:r>
+                    </a:p>
+                  </a:txBody>
+                  <a:tcPr/>
+                </a:tc>
+                <a:tc>
+                  <a:txBody>
+                    <a:bodyPr/>
+                    <a:lstStyle/>
+                    <a:p>
+                      <a:r>
+                        <a:t>标题二</a:t>
+                      </a:r>
+                    </a:p>
+                  </a:txBody>
+                  <a:tcPr/>
+                </a:tc>
+                <a:tc>
+                  <a:txBody>
+                    <a:bodyPr/>
+                    <a:lstStyle/>
+                    <a:p>
+                      <a:r>
+                        <a:t>标题三</a:t>
+                      </a:r>
+                    </a:p>
+                  </a:txBody>
+                  <a:tcPr/>
+                </a:tc>
+                <a:tc>
+                  <a:txBody>
+                    <a:bodyPr/>
+                    <a:lstStyle/>
+                    <a:p>
+                      <a:r>
+                        <a:t>标题四</a:t>
+                      </a:r>
+                    </a:p>
+                  </a:txBody>
+                  <a:tcPr/>
+                </a:tc>
+              </a:tr>
+              <a:tr h="857250">
+                <a:tc>
+                  <a:txBody>
+                    <a:bodyPr/>
+                    <a:lstStyle/>
+                    <a:p>
+                      <a:r>
+                        <a:t>条纹一</a:t>
+                      </a:r>
+                    </a:p>
+                  </a:txBody>
+                  <a:tcPr/>
+                </a:tc>
+                <a:tc>
+                  <a:txBody>
+                    <a:bodyPr/>
+                    <a:lstStyle/>
+                    <a:p>
+                      <a:r>
+                        <a:t>条纹二</a:t>
+                      </a:r>
+                    </a:p>
+                  </a:txBody>
+                  <a:tcPr/>
+                </a:tc>
+                <a:tc>
+                  <a:txBody>
+                    <a:bodyPr/>
+                    <a:lstStyle/>
+                    <a:p>
+                      <a:r>
+                        <a:t>条纹三</a:t>
+                      </a:r>
+                    </a:p>
+                  </a:txBody>
+                  <a:tcPr/>
+                </a:tc>
+                <a:tc>
+                  <a:txBody>
+                    <a:bodyPr/>
+                    <a:lstStyle/>
+                    <a:p>
+                      <a:r>
+                        <a:t>条纹四</a:t>
+                      </a:r>
+                    </a:p>
+                  </a:txBody>
+                  <a:tcPr/>
+                </a:tc>
+              </a:tr>
+              <a:tr h="857250">
+                <a:tc gridSpan="2">
+                  <a:txBody>
+                    <a:bodyPr/>
+                    <a:lstStyle/>
+                    <a:p>
+                      <a:r>
+                        <a:rPr sz="2100"/>
+                        <a:t>末行合并</a:t>
+                      </a:r>
+                    </a:p>
+                  </a:txBody>
+                  <a:tcPr/>
+                </a:tc>
+                <a:tc hMerge="1">
+                  <a:txBody>
+                    <a:bodyPr/>
+                    <a:lstStyle/>
+                    <a:p>
+                      <a:r>
+                        <a:t>横向占位</a:t>
+                      </a:r>
+                    </a:p>
+                  </a:txBody>
+                  <a:tcPr/>
+                </a:tc>
+                <a:tc>
+                  <a:txBody>
+                    <a:bodyPr/>
+                    <a:lstStyle/>
+                    <a:p>
+                      <a:r>
+                        <a:rPr sz="1900"/>
+                        <a:t>末行三</a:t>
+                      </a:r>
+                    </a:p>
+                  </a:txBody>
+                  <a:tcPr/>
+                </a:tc>
+                <a:tc>
+                  <a:txBody>
+                    <a:bodyPr/>
+                    <a:lstStyle/>
+                    <a:p xmlns:a14="http://schemas.microsoft.com/office/drawing/2010/main" a14:paraId="00112233">
+                      <a:r>
+                        <a:rPr sz="1900"/>
+                        <a:t>末格</a:t>
+                      </a:r>
+                      <mc:AlternateContent xmlns:mc="http://schemas.openxmlformats.org/markup-compatibility/2006">
+                        <mc:Choice Requires="a14">
+                          <a:r>
+                            <a:t>兼容旧字</a:t>
+                          </a:r>
+                        </mc:Choice>
+                        <mc:Fallback>
+                          <a:r>
+                            <a:t>回退旧字</a:t>
+                          </a:r>
+                        </mc:Fallback>
+                      </mc:AlternateContent>
+                    </a:p>
+                  </a:txBody>
+                  <a:tcPr/>
+                </a:tc>
+              </a:tr>
+              <a:extLst>
+                <a:ext uri="{4485728A-C22C-4D8B-9C62-18D05E3A3D8C}">
+                  <a14:compatExt xmlns:a14="http://schemas.microsoft.com/office/drawing/2010/main" spid="_x0000_s2048"/>
+                </a:ext>
+              </a:extLst>
+            </a:tbl>
+          </a:graphicData>
+        </a:graphic>
+      </p:graphicFrame>
+      <p:graphicFrame>
+        <p:nvGraphicFramePr>
+          <p:cNvPr id="104" name="仅行条纹"/>
+          <p:cNvGraphicFramePr/>
+          <p:nvPr/>
+        </p:nvGraphicFramePr>
+        <p:xfrm>
+          <a:off x="1333500" y="4095750"/>
+          <a:ext cx="4953000" cy="1333500"/>
+        </p:xfrm>
+        <a:graphic>
+          <a:graphicData uri="http://schemas.openxmlformats.org/drawingml/2006/table">
+            <a:tbl>
+              <a:tblPr firstRow="1" bandRow="1">
+                <a:tableStyleId>{BFD9FC95-08A9-47D3-9785-8DB2E5A35D39}</a:tableStyleId>
+              </a:tblPr>
+              <a:tblGrid>
+                <a:gridCol w="2476500"/>
+                <a:gridCol w="2476500"/>
+              </a:tblGrid>
+              <a:tr h="666750">
+                <a:tc>
+                  <a:txBody>
+                    <a:bodyPr/>
+                    <a:lstStyle/>
+                    <a:p>
+                      <a:r>
+                        <a:t>条纹标题一</a:t>
+                      </a:r>
+                    </a:p>
+                  </a:txBody>
+                  <a:tcPr/>
+                </a:tc>
+                <a:tc>
+                  <a:txBody>
+                    <a:bodyPr/>
+                    <a:lstStyle/>
+                    <a:p>
+                      <a:r>
+                        <a:t>条纹标题二</a:t>
+                      </a:r>
+                    </a:p>
+                  </a:txBody>
+                  <a:tcPr/>
+                </a:tc>
+              </a:tr>
+              <a:tr h="666750">
+                <a:tc>
+                  <a:txBody>
+                    <a:bodyPr/>
+                    <a:lstStyle/>
+                    <a:p>
+                      <a:r>
+                        <a:t>条纹起点一</a:t>
+                      </a:r>
+                    </a:p>
+                  </a:txBody>
+                  <a:tcPr/>
+                </a:tc>
+                <a:tc>
+                  <a:txBody>
+                    <a:bodyPr/>
+                    <a:lstStyle/>
+                    <a:p>
+                      <a:r>
+                        <a:t>条纹起点二</a:t>
+                      </a:r>
+                    </a:p>
+                  </a:txBody>
+                  <a:tcPr/>
+                </a:tc>
+              </a:tr>
+            </a:tbl>
+          </a:graphicData>
+        </a:graphic>
+      </p:graphicFrame>
+    </p:spTree>
+  </p:cSld>
+  <p:clrMapOvr>
+    <a:masterClrMapping/>
+  </p:clrMapOvr>
+</p:sld>
+</file>
+
 <file path=ppt/theme/theme1.xml><?xml version="1.0" encoding="utf-8"?>
 <a:theme xmlns:a="http://schemas.openxmlformats.org/drawingml/2006/main" name="Editor Table Text">
   <a:themeElements>
